--- a/media/resources/files/Onduktar_Koboytuu_BoluuJenilOrtoOor_RT1AYa6.pptx
+++ b/media/resources/files/Onduktar_Koboytuu_BoluuJenilOrtoOor_RT1AYa6.pptx
@@ -9153,7 +9153,7 @@
                 <a:ea typeface="+mn-ea"/>
                 <a:cs typeface="+mn-cs"/>
               </a:rPr>
-              <a:t>Турдуу пикирлер учун ыраазычылык билдиребиз.</a:t>
+              <a:t>Түрдүү пикирлер үчүн ыраазычылык билдиребиз.</a:t>
             </a:r>
           </a:p>
           <a:p>

--- a/media/resources/files/Onduktar_Koboytuu_BoluuJenilOrtoOor_RT1AYa6.pptx
+++ b/media/resources/files/Onduktar_Koboytuu_BoluuJenilOrtoOor_RT1AYa6.pptx
@@ -2085,7 +2085,7 @@
           <a:p>
             <a:r>
               <a:rPr lang="en-GB" sz="2000" dirty="0"/>
-              <a:t>2 × 0.4</a:t>
+              <a:t>2 × 0,4</a:t>
             </a:r>
           </a:p>
         </p:txBody>
@@ -2161,7 +2161,7 @@
           <a:p>
             <a:r>
               <a:rPr lang="en-GB" sz="2000" dirty="0"/>
-              <a:t>0.2 × 0.2</a:t>
+              <a:t>0,2 × 0,2</a:t>
             </a:r>
           </a:p>
         </p:txBody>
@@ -2237,7 +2237,7 @@
           <a:p>
             <a:r>
               <a:rPr lang="en-GB" sz="2000" dirty="0"/>
-              <a:t>1.3 × 0.6</a:t>
+              <a:t>1,3 × 0,6</a:t>
             </a:r>
           </a:p>
         </p:txBody>
@@ -2313,7 +2313,7 @@
           <a:p>
             <a:r>
               <a:rPr lang="en-GB" sz="2000" dirty="0"/>
-              <a:t>4 × 0.6</a:t>
+              <a:t>4 × 0,6</a:t>
             </a:r>
           </a:p>
         </p:txBody>
@@ -2389,7 +2389,7 @@
           <a:p>
             <a:r>
               <a:rPr lang="en-GB" sz="2000" dirty="0"/>
-              <a:t>0.6 × 0.5</a:t>
+              <a:t>0,6 × 0,5</a:t>
             </a:r>
           </a:p>
         </p:txBody>
@@ -2465,7 +2465,7 @@
           <a:p>
             <a:r>
               <a:rPr lang="en-GB" sz="2000" dirty="0"/>
-              <a:t>0.4 × 0.13</a:t>
+              <a:t>0,4 × 0,13</a:t>
             </a:r>
           </a:p>
         </p:txBody>
@@ -2541,7 +2541,7 @@
           <a:p>
             <a:r>
               <a:rPr lang="en-GB" sz="2000" dirty="0"/>
-              <a:t>1.1 × 7</a:t>
+              <a:t>1,1 × 7</a:t>
             </a:r>
           </a:p>
         </p:txBody>
@@ -2617,7 +2617,7 @@
           <a:p>
             <a:r>
               <a:rPr lang="en-GB" sz="2000" dirty="0"/>
-              <a:t>0.6 × 1.4</a:t>
+              <a:t>0,6 × 1,4</a:t>
             </a:r>
           </a:p>
         </p:txBody>
@@ -2693,7 +2693,7 @@
           <a:p>
             <a:r>
               <a:rPr lang="en-GB" sz="2000" dirty="0"/>
-              <a:t>4.2 × 0.15</a:t>
+              <a:t>4,2 × 0,15</a:t>
             </a:r>
           </a:p>
         </p:txBody>
@@ -2769,7 +2769,7 @@
           <a:p>
             <a:r>
               <a:rPr lang="en-GB" sz="2000" dirty="0"/>
-              <a:t>4 × 1.7</a:t>
+              <a:t>4 × 1,7</a:t>
             </a:r>
           </a:p>
         </p:txBody>
@@ -2845,7 +2845,7 @@
           <a:p>
             <a:r>
               <a:rPr lang="en-GB" sz="2000" dirty="0"/>
-              <a:t>2.3 × 1.1</a:t>
+              <a:t>2,3 × 1,1</a:t>
             </a:r>
           </a:p>
         </p:txBody>
@@ -2921,7 +2921,7 @@
           <a:p>
             <a:r>
               <a:rPr lang="en-GB" sz="2000" dirty="0"/>
-              <a:t>1.42 × 2.5</a:t>
+              <a:t>1,42 × 2,5</a:t>
             </a:r>
           </a:p>
         </p:txBody>
@@ -2998,7 +2998,7 @@
             <a:pPr algn="ctr"/>
             <a:r>
               <a:rPr lang="en-GB" sz="2000" dirty="0"/>
-              <a:t>6 ÷ 0.2</a:t>
+              <a:t>6 ÷ 0,2</a:t>
             </a:r>
           </a:p>
         </p:txBody>
@@ -3075,7 +3075,7 @@
             <a:pPr algn="ctr"/>
             <a:r>
               <a:rPr lang="en-GB" sz="2000" dirty="0"/>
-              <a:t>9 ÷ 1.5</a:t>
+              <a:t>9 ÷ 1,5</a:t>
             </a:r>
           </a:p>
         </p:txBody>
@@ -3152,7 +3152,7 @@
             <a:pPr algn="ctr"/>
             <a:r>
               <a:rPr lang="en-GB" sz="2000" dirty="0"/>
-              <a:t>5 ÷ 0.04</a:t>
+              <a:t>5 ÷ 0,04</a:t>
             </a:r>
           </a:p>
         </p:txBody>
@@ -3229,7 +3229,7 @@
             <a:pPr algn="ctr"/>
             <a:r>
               <a:rPr lang="en-GB" sz="2000" dirty="0"/>
-              <a:t>12 ÷ 0.3</a:t>
+              <a:t>12 ÷ 0,3</a:t>
             </a:r>
           </a:p>
         </p:txBody>
@@ -3306,7 +3306,7 @@
             <a:pPr algn="ctr"/>
             <a:r>
               <a:rPr lang="en-GB" sz="2000" dirty="0"/>
-              <a:t>17 ÷ 1.7</a:t>
+              <a:t>17 ÷ 1,7</a:t>
             </a:r>
           </a:p>
         </p:txBody>
@@ -3383,7 +3383,7 @@
             <a:pPr algn="ctr"/>
             <a:r>
               <a:rPr lang="en-GB" sz="2000" dirty="0"/>
-              <a:t>12 ÷ 0.25</a:t>
+              <a:t>12 ÷ 0,25</a:t>
             </a:r>
           </a:p>
         </p:txBody>
@@ -3460,7 +3460,7 @@
             <a:pPr algn="ctr"/>
             <a:r>
               <a:rPr lang="en-GB" sz="2000" dirty="0"/>
-              <a:t>8.4 ÷ 0.7</a:t>
+              <a:t>8,4 ÷ 0,7</a:t>
             </a:r>
           </a:p>
         </p:txBody>
@@ -3537,7 +3537,7 @@
             <a:pPr algn="ctr"/>
             <a:r>
               <a:rPr lang="en-GB" sz="2000" dirty="0"/>
-              <a:t>12.4 ÷ 0.4</a:t>
+              <a:t>12,4 ÷ 0,4</a:t>
             </a:r>
           </a:p>
         </p:txBody>
@@ -3614,7 +3614,7 @@
             <a:pPr algn="ctr"/>
             <a:r>
               <a:rPr lang="en-GB" sz="2000" dirty="0"/>
-              <a:t>28.6 ÷ 1.3</a:t>
+              <a:t>28,6 ÷ 1,3</a:t>
             </a:r>
           </a:p>
         </p:txBody>
@@ -3691,7 +3691,7 @@
             <a:pPr algn="ctr"/>
             <a:r>
               <a:rPr lang="en-GB" sz="2000" dirty="0"/>
-              <a:t>0.56 ÷ 2</a:t>
+              <a:t>0,56 ÷ 2</a:t>
             </a:r>
           </a:p>
         </p:txBody>
@@ -3768,7 +3768,7 @@
             <a:pPr algn="ctr"/>
             <a:r>
               <a:rPr lang="en-GB" sz="2000" dirty="0"/>
-              <a:t>50.4 ÷ 0.8</a:t>
+              <a:t>50,4 ÷ 0,8</a:t>
             </a:r>
           </a:p>
         </p:txBody>
@@ -3845,7 +3845,7 @@
             <a:pPr algn="ctr"/>
             <a:r>
               <a:rPr lang="en-GB" sz="2000" dirty="0"/>
-              <a:t>17.4 ÷ 1.2</a:t>
+              <a:t>17,4 ÷ 1,2</a:t>
             </a:r>
           </a:p>
         </p:txBody>
@@ -4508,7 +4508,7 @@
           <a:p>
             <a:r>
               <a:rPr lang="en-GB" sz="2000" dirty="0"/>
-              <a:t>2 × 0.4</a:t>
+              <a:t>2 × 0,4</a:t>
             </a:r>
           </a:p>
         </p:txBody>
@@ -4584,7 +4584,7 @@
           <a:p>
             <a:r>
               <a:rPr lang="en-GB" sz="2000" dirty="0"/>
-              <a:t>0.2 × 0.2</a:t>
+              <a:t>0,2 × 0,2</a:t>
             </a:r>
           </a:p>
         </p:txBody>
@@ -4660,7 +4660,7 @@
           <a:p>
             <a:r>
               <a:rPr lang="en-GB" sz="2000" dirty="0"/>
-              <a:t>1.3 × 0.6</a:t>
+              <a:t>1,3 × 0,6</a:t>
             </a:r>
           </a:p>
         </p:txBody>
@@ -4702,7 +4702,7 @@
           <a:p>
             <a:r>
               <a:rPr lang="en-GB" sz="2000" dirty="0"/>
-              <a:t>=0.78</a:t>
+              <a:t>=0,78</a:t>
             </a:r>
           </a:p>
         </p:txBody>
@@ -4778,7 +4778,7 @@
           <a:p>
             <a:r>
               <a:rPr lang="en-GB" sz="2000" dirty="0"/>
-              <a:t>4 × 0.6</a:t>
+              <a:t>4 × 0,6</a:t>
             </a:r>
           </a:p>
         </p:txBody>
@@ -4854,7 +4854,7 @@
           <a:p>
             <a:r>
               <a:rPr lang="en-GB" sz="2000" dirty="0"/>
-              <a:t>0.6 × 0.5</a:t>
+              <a:t>0,6 × 0,5</a:t>
             </a:r>
           </a:p>
         </p:txBody>
@@ -4930,7 +4930,7 @@
           <a:p>
             <a:r>
               <a:rPr lang="en-GB" sz="2000" dirty="0"/>
-              <a:t>0.4 × 0.13</a:t>
+              <a:t>0,4 × 0,13</a:t>
             </a:r>
           </a:p>
         </p:txBody>
@@ -4972,7 +4972,7 @@
           <a:p>
             <a:r>
               <a:rPr lang="en-GB" sz="2000" dirty="0"/>
-              <a:t>=0.052</a:t>
+              <a:t>=0,052</a:t>
             </a:r>
           </a:p>
         </p:txBody>
@@ -5048,7 +5048,7 @@
           <a:p>
             <a:r>
               <a:rPr lang="en-GB" sz="2000" dirty="0"/>
-              <a:t>1.1 × 7</a:t>
+              <a:t>1,1 × 7</a:t>
             </a:r>
           </a:p>
         </p:txBody>
@@ -5124,7 +5124,7 @@
           <a:p>
             <a:r>
               <a:rPr lang="en-GB" sz="2000" dirty="0"/>
-              <a:t>0.6 × 1.4</a:t>
+              <a:t>0,6 × 1,4</a:t>
             </a:r>
           </a:p>
         </p:txBody>
@@ -5200,7 +5200,7 @@
           <a:p>
             <a:r>
               <a:rPr lang="en-GB" sz="2000" dirty="0"/>
-              <a:t>4.2 × 0.15</a:t>
+              <a:t>4,2 × 0,15</a:t>
             </a:r>
           </a:p>
         </p:txBody>
@@ -5242,7 +5242,7 @@
           <a:p>
             <a:r>
               <a:rPr lang="en-GB" sz="2000" dirty="0"/>
-              <a:t>=0.63</a:t>
+              <a:t>=0,63</a:t>
             </a:r>
           </a:p>
         </p:txBody>
@@ -5318,7 +5318,7 @@
           <a:p>
             <a:r>
               <a:rPr lang="en-GB" sz="2000" dirty="0"/>
-              <a:t>4 × 1.7</a:t>
+              <a:t>4 × 1,7</a:t>
             </a:r>
           </a:p>
         </p:txBody>
@@ -5394,7 +5394,7 @@
           <a:p>
             <a:r>
               <a:rPr lang="en-GB" sz="2000" dirty="0"/>
-              <a:t>2.3 × 1.1</a:t>
+              <a:t>2,3 × 1,1</a:t>
             </a:r>
           </a:p>
         </p:txBody>
@@ -5470,7 +5470,7 @@
           <a:p>
             <a:r>
               <a:rPr lang="en-GB" sz="2000" dirty="0"/>
-              <a:t>1.42 × 2.5</a:t>
+              <a:t>1,42 × 2,5</a:t>
             </a:r>
           </a:p>
         </p:txBody>
@@ -5512,7 +5512,7 @@
           <a:p>
             <a:r>
               <a:rPr lang="en-GB" sz="2000"/>
-              <a:t>=3.55</a:t>
+              <a:t>=3,55</a:t>
             </a:r>
             <a:endParaRPr lang="en-GB" sz="2000" dirty="0"/>
           </a:p>
@@ -5590,7 +5590,7 @@
             <a:pPr algn="ctr"/>
             <a:r>
               <a:rPr lang="en-GB" sz="2000" dirty="0"/>
-              <a:t>6 ÷ 0.2</a:t>
+              <a:t>6 ÷ 0,2</a:t>
             </a:r>
           </a:p>
         </p:txBody>
@@ -5667,7 +5667,7 @@
             <a:pPr algn="ctr"/>
             <a:r>
               <a:rPr lang="en-GB" sz="2000" dirty="0"/>
-              <a:t>9 ÷ 1.5</a:t>
+              <a:t>9 ÷ 1,5</a:t>
             </a:r>
           </a:p>
         </p:txBody>
@@ -5786,7 +5786,7 @@
             <a:pPr algn="ctr"/>
             <a:r>
               <a:rPr lang="en-GB" sz="2000" dirty="0"/>
-              <a:t>5 ÷ 0.04</a:t>
+              <a:t>5 ÷ 0,04</a:t>
             </a:r>
           </a:p>
         </p:txBody>
@@ -5863,7 +5863,7 @@
             <a:pPr algn="ctr"/>
             <a:r>
               <a:rPr lang="en-GB" sz="2000" dirty="0"/>
-              <a:t>12 ÷ 0.3</a:t>
+              <a:t>12 ÷ 0,3</a:t>
             </a:r>
           </a:p>
         </p:txBody>
@@ -5940,7 +5940,7 @@
             <a:pPr algn="ctr"/>
             <a:r>
               <a:rPr lang="en-GB" sz="2000" dirty="0"/>
-              <a:t>17 ÷ 1.7</a:t>
+              <a:t>17 ÷ 1,7</a:t>
             </a:r>
           </a:p>
         </p:txBody>
@@ -6059,7 +6059,7 @@
             <a:pPr algn="ctr"/>
             <a:r>
               <a:rPr lang="en-GB" sz="2000" dirty="0"/>
-              <a:t>12 ÷ 0.25</a:t>
+              <a:t>12 ÷ 0,25</a:t>
             </a:r>
           </a:p>
         </p:txBody>
@@ -6136,7 +6136,7 @@
             <a:pPr algn="ctr"/>
             <a:r>
               <a:rPr lang="en-GB" sz="2000" dirty="0"/>
-              <a:t>8.4 ÷ 0.7</a:t>
+              <a:t>8,4 ÷ 0,7</a:t>
             </a:r>
           </a:p>
         </p:txBody>
@@ -6213,7 +6213,7 @@
             <a:pPr algn="ctr"/>
             <a:r>
               <a:rPr lang="en-GB" sz="2000" dirty="0"/>
-              <a:t>12.4 ÷ 0.4</a:t>
+              <a:t>12,4 ÷ 0,4</a:t>
             </a:r>
           </a:p>
         </p:txBody>
@@ -6332,7 +6332,7 @@
             <a:pPr algn="ctr"/>
             <a:r>
               <a:rPr lang="en-GB" sz="2000" dirty="0"/>
-              <a:t>28.6 ÷ 1.3</a:t>
+              <a:t>28,6 ÷ 1,3</a:t>
             </a:r>
           </a:p>
         </p:txBody>
@@ -6415,7 +6415,7 @@
           <a:p>
             <a:r>
               <a:rPr lang="en-GB" sz="2000" dirty="0"/>
-              <a:t>=0.8</a:t>
+              <a:t>=0,8</a:t>
             </a:r>
           </a:p>
         </p:txBody>
@@ -6457,7 +6457,7 @@
           <a:p>
             <a:r>
               <a:rPr lang="en-GB" sz="2000" dirty="0"/>
-              <a:t>=2.4</a:t>
+              <a:t>=2,4</a:t>
             </a:r>
           </a:p>
         </p:txBody>
@@ -6499,7 +6499,7 @@
           <a:p>
             <a:r>
               <a:rPr lang="en-GB" sz="2000" dirty="0"/>
-              <a:t>=7.7</a:t>
+              <a:t>=7,7</a:t>
             </a:r>
           </a:p>
         </p:txBody>
@@ -6541,7 +6541,7 @@
           <a:p>
             <a:r>
               <a:rPr lang="en-GB" sz="2000" dirty="0"/>
-              <a:t>=6.8</a:t>
+              <a:t>=6,8</a:t>
             </a:r>
           </a:p>
         </p:txBody>
@@ -6709,7 +6709,7 @@
           <a:p>
             <a:r>
               <a:rPr lang="en-GB" sz="2000" dirty="0"/>
-              <a:t>= 0.28</a:t>
+              <a:t>= 0,28</a:t>
             </a:r>
           </a:p>
         </p:txBody>
@@ -6745,7 +6745,7 @@
             <a:pPr algn="ctr"/>
             <a:r>
               <a:rPr lang="en-GB" sz="2000" dirty="0"/>
-              <a:t>0.56 ÷ 2</a:t>
+              <a:t>0,56 ÷ 2</a:t>
             </a:r>
           </a:p>
         </p:txBody>
@@ -6828,7 +6828,7 @@
           <a:p>
             <a:r>
               <a:rPr lang="en-GB" sz="2000" dirty="0"/>
-              <a:t>=0.04</a:t>
+              <a:t>=0,04</a:t>
             </a:r>
           </a:p>
         </p:txBody>
@@ -6870,7 +6870,7 @@
           <a:p>
             <a:r>
               <a:rPr lang="en-GB" sz="2000" dirty="0"/>
-              <a:t>=0.3</a:t>
+              <a:t>=0,3</a:t>
             </a:r>
           </a:p>
         </p:txBody>
@@ -6912,7 +6912,7 @@
           <a:p>
             <a:r>
               <a:rPr lang="en-GB" sz="2000" dirty="0"/>
-              <a:t>=0.84</a:t>
+              <a:t>=0,84</a:t>
             </a:r>
           </a:p>
         </p:txBody>
@@ -6954,7 +6954,7 @@
           <a:p>
             <a:r>
               <a:rPr lang="en-GB" sz="2000" dirty="0"/>
-              <a:t>=2.53</a:t>
+              <a:t>=2,53</a:t>
             </a:r>
           </a:p>
         </p:txBody>
@@ -7158,7 +7158,7 @@
             <a:pPr algn="ctr"/>
             <a:r>
               <a:rPr lang="en-GB" sz="2000" dirty="0"/>
-              <a:t>50.4 ÷ 0.8</a:t>
+              <a:t>50,4 ÷ 0,8</a:t>
             </a:r>
           </a:p>
         </p:txBody>
@@ -7241,7 +7241,7 @@
           <a:p>
             <a:r>
               <a:rPr lang="en-GB" sz="2000" dirty="0"/>
-              <a:t>= 14.5</a:t>
+              <a:t>= 14,5</a:t>
             </a:r>
           </a:p>
         </p:txBody>
@@ -7277,7 +7277,7 @@
             <a:pPr algn="ctr"/>
             <a:r>
               <a:rPr lang="en-GB" sz="2000" dirty="0"/>
-              <a:t>17.4 ÷ 1.2</a:t>
+              <a:t>17,4 ÷ 1,2</a:t>
             </a:r>
           </a:p>
         </p:txBody>
